--- a/catalog/samples/decision_fork.pptx
+++ b/catalog/samples/decision_fork.pptx
@@ -1172,7 +1172,7 @@
           </a:p>
           <a:p>
             <a:r>
-              <a:t>  "template_sha256": "e59a22f610f34ac26753c34194a46699d6ec08c496abfb250007d6b391507f15"</a:t>
+              <a:t>  "template_sha256": "076b6f5420d3e38aabc724d8fd4c0e5a7d72000ec88e1692d47668a481d02676"</a:t>
             </a:r>
           </a:p>
           <a:p>
